--- a/output/技术路线图/南航开放课题_技术路线图_可编辑.pptx
+++ b/output/技术路线图/南航开放课题_技术路线图_可编辑.pptx
@@ -107,6 +107,11 @@
       </a:defRPr>
     </a:lvl9pPr>
   </p:defaultTextStyle>
+  <p:extLst>
+    <p:ext uri="{EFAFB233-063F-42B5-8137-9DF3F51BA10A}">
+      <p15:sldGuideLst xmlns:p15="http://schemas.microsoft.com/office/powerpoint/2012/main"/>
+    </p:ext>
+  </p:extLst>
 </p:presentation>
 </file>
 
@@ -1045,8 +1050,8 @@
         </p:nvSpPr>
         <p:spPr>
           <a:xfrm>
-            <a:off x="1257300" y="1804036"/>
-            <a:ext cx="6248400" cy="7115175"/>
+            <a:off x="1257300" y="1804037"/>
+            <a:ext cx="6248400" cy="6656388"/>
           </a:xfrm>
           <a:prstGeom prst="roundRect">
             <a:avLst>
@@ -1250,8 +1255,8 @@
         </p:nvSpPr>
         <p:spPr>
           <a:xfrm>
-            <a:off x="9639300" y="1804036"/>
-            <a:ext cx="6248400" cy="7115175"/>
+            <a:off x="9639300" y="1804037"/>
+            <a:ext cx="6248400" cy="6656388"/>
           </a:xfrm>
           <a:prstGeom prst="roundRect">
             <a:avLst>
@@ -1545,7 +1550,7 @@
               </a:defRPr>
             </a:pPr>
             <a:r>
-              <a:rPr sz="2625" b="1" dirty="0" err="1">
+              <a:rPr lang="zh-CN" altLang="en-US" sz="2625" b="1" dirty="0">
                 <a:solidFill>
                   <a:srgbClr val="365C7E"/>
                 </a:solidFill>
@@ -1553,7 +1558,7 @@
                 <a:ea typeface="Microsoft YaHei"/>
                 <a:cs typeface="Microsoft YaHei"/>
               </a:rPr>
-              <a:t>安装界面耦合表征</a:t>
+              <a:t>反向刚体树动力学建模</a:t>
             </a:r>
             <a:endParaRPr sz="2625" b="1" dirty="0">
               <a:solidFill>
@@ -1671,15 +1676,8 @@
               </a:defRPr>
             </a:pPr>
             <a:r>
-              <a:rPr sz="2325" b="0" dirty="0" err="1">
-                <a:solidFill>
-                  <a:srgbClr val="223342"/>
-                </a:solidFill>
-                <a:latin typeface="Microsoft YaHei"/>
-                <a:ea typeface="Microsoft YaHei"/>
-                <a:cs typeface="Microsoft YaHei"/>
-              </a:rPr>
-              <a:t>界面运动与载荷的耦合传递</a:t>
+              <a:rPr lang="zh-CN" altLang="en-US" dirty="0"/>
+              <a:t>桁架振动与机械臂运动的双向耦合</a:t>
             </a:r>
             <a:endParaRPr sz="2325" b="0" dirty="0">
               <a:solidFill>
@@ -1870,16 +1868,17 @@
               </a:defRPr>
             </a:pPr>
             <a:r>
-              <a:rPr sz="2325" b="0">
-                <a:solidFill>
-                  <a:srgbClr val="223342"/>
-                </a:solidFill>
-                <a:latin typeface="Microsoft YaHei"/>
-                <a:ea typeface="Microsoft YaHei"/>
-                <a:cs typeface="Microsoft YaHei"/>
-              </a:rPr>
-              <a:t>位姿误差动态与坐标映射</a:t>
-            </a:r>
+              <a:rPr lang="zh-CN" altLang="en-US" dirty="0"/>
+              <a:t>位姿误差与接触力的动态关系</a:t>
+            </a:r>
+            <a:endParaRPr sz="2325" b="0" dirty="0">
+              <a:solidFill>
+                <a:srgbClr val="223342"/>
+              </a:solidFill>
+              <a:latin typeface="Microsoft YaHei"/>
+              <a:ea typeface="Microsoft YaHei"/>
+              <a:cs typeface="Microsoft YaHei"/>
+            </a:endParaRPr>
           </a:p>
         </p:txBody>
       </p:sp>
@@ -1925,7 +1924,7 @@
               </a:defRPr>
             </a:pPr>
             <a:r>
-              <a:rPr sz="2325" b="0">
+              <a:rPr lang="zh-CN" altLang="en-US" sz="2325" b="0" dirty="0">
                 <a:solidFill>
                   <a:srgbClr val="223342"/>
                 </a:solidFill>
@@ -1933,7 +1932,7 @@
                 <a:ea typeface="Microsoft YaHei"/>
                 <a:cs typeface="Microsoft YaHei"/>
               </a:rPr>
-              <a:t>生成作业端参考加速度</a:t>
+              <a:t>生成兼顾跟踪与柔顺的参考加速度</a:t>
             </a:r>
           </a:p>
         </p:txBody>
@@ -2146,7 +2145,40 @@
                 <a:ea typeface="Microsoft YaHei"/>
                 <a:cs typeface="Microsoft YaHei"/>
               </a:rPr>
-              <a:t>关节运动、力矩及变化量约束</a:t>
+              <a:t>关节运动</a:t>
+            </a:r>
+            <a:r>
+              <a:rPr sz="2325" b="0" dirty="0">
+                <a:solidFill>
+                  <a:srgbClr val="223342"/>
+                </a:solidFill>
+                <a:latin typeface="Microsoft YaHei"/>
+                <a:ea typeface="Microsoft YaHei"/>
+                <a:cs typeface="Microsoft YaHei"/>
+              </a:rPr>
+              <a:t>、</a:t>
+            </a:r>
+            <a:r>
+              <a:rPr lang="zh-CN" altLang="en-US" sz="2325" b="0" dirty="0">
+                <a:solidFill>
+                  <a:srgbClr val="223342"/>
+                </a:solidFill>
+                <a:latin typeface="Microsoft YaHei"/>
+                <a:ea typeface="Microsoft YaHei"/>
+                <a:cs typeface="Microsoft YaHei"/>
+              </a:rPr>
+              <a:t>驱动</a:t>
+            </a:r>
+            <a:r>
+              <a:rPr sz="2325" b="0" dirty="0" err="1">
+                <a:solidFill>
+                  <a:srgbClr val="223342"/>
+                </a:solidFill>
+                <a:latin typeface="Microsoft YaHei"/>
+                <a:ea typeface="Microsoft YaHei"/>
+                <a:cs typeface="Microsoft YaHei"/>
+              </a:rPr>
+              <a:t>力矩及变化量约束</a:t>
             </a:r>
             <a:endParaRPr sz="2325" b="0" dirty="0">
               <a:solidFill>
@@ -2201,15 +2233,8 @@
               </a:defRPr>
             </a:pPr>
             <a:r>
-              <a:rPr sz="2325" b="0" dirty="0" err="1">
-                <a:solidFill>
-                  <a:srgbClr val="223342"/>
-                </a:solidFill>
-                <a:latin typeface="Microsoft YaHei"/>
-                <a:ea typeface="Microsoft YaHei"/>
-                <a:cs typeface="Microsoft YaHei"/>
-              </a:rPr>
-              <a:t>阻抗可实现性与局部误差界</a:t>
+              <a:rPr lang="zh-CN" altLang="en-US" dirty="0"/>
+              <a:t>驱动受限时的柔顺响应与跟踪误差</a:t>
             </a:r>
             <a:endParaRPr sz="2325" b="0" dirty="0">
               <a:solidFill>
@@ -2381,7 +2406,7 @@
               </a:defRPr>
             </a:pPr>
             <a:r>
-              <a:rPr sz="2325" b="0">
+              <a:rPr sz="2325" b="0" dirty="0" err="1">
                 <a:solidFill>
                   <a:srgbClr val="223342"/>
                 </a:solidFill>
@@ -2389,7 +2414,18 @@
                 <a:ea typeface="Microsoft YaHei"/>
                 <a:cs typeface="Microsoft YaHei"/>
               </a:rPr>
-              <a:t>物理方向辅助接触场配准 PCF</a:t>
+              <a:t>物理方向辅助接触场配准</a:t>
+            </a:r>
+            <a:r>
+              <a:rPr sz="2325" b="0" dirty="0">
+                <a:solidFill>
+                  <a:srgbClr val="223342"/>
+                </a:solidFill>
+                <a:latin typeface="Microsoft YaHei"/>
+                <a:ea typeface="Microsoft YaHei"/>
+                <a:cs typeface="Microsoft YaHei"/>
+              </a:rPr>
+              <a:t> PCF</a:t>
             </a:r>
           </a:p>
         </p:txBody>
@@ -2436,16 +2472,17 @@
               </a:defRPr>
             </a:pPr>
             <a:r>
-              <a:rPr sz="2325" b="0">
-                <a:solidFill>
-                  <a:srgbClr val="223342"/>
-                </a:solidFill>
-                <a:latin typeface="Microsoft YaHei"/>
-                <a:ea typeface="Microsoft YaHei"/>
-                <a:cs typeface="Microsoft YaHei"/>
-              </a:rPr>
-              <a:t>基座运动补偿与局部可辨识性</a:t>
-            </a:r>
+              <a:rPr lang="zh-CN" altLang="en-US"/>
+              <a:t>观测偏差补偿</a:t>
+            </a:r>
+            <a:endParaRPr sz="2325" b="0" dirty="0">
+              <a:solidFill>
+                <a:srgbClr val="223342"/>
+              </a:solidFill>
+              <a:latin typeface="Microsoft YaHei"/>
+              <a:ea typeface="Microsoft YaHei"/>
+              <a:cs typeface="Microsoft YaHei"/>
+            </a:endParaRPr>
           </a:p>
         </p:txBody>
       </p:sp>
@@ -2663,7 +2700,7 @@
               </a:defRPr>
             </a:pPr>
             <a:r>
-              <a:rPr sz="2325" b="0">
+              <a:rPr sz="2325" b="0" dirty="0" err="1">
                 <a:solidFill>
                   <a:srgbClr val="223342"/>
                 </a:solidFill>
@@ -2671,8 +2708,38 @@
                 <a:ea typeface="Microsoft YaHei"/>
                 <a:cs typeface="Microsoft YaHei"/>
               </a:rPr>
-              <a:t>修正速率与累计偏移约束</a:t>
-            </a:r>
+              <a:t>修正速率</a:t>
+            </a:r>
+            <a:r>
+              <a:rPr lang="zh-CN" altLang="en-US" sz="2325" b="0" dirty="0">
+                <a:solidFill>
+                  <a:srgbClr val="223342"/>
+                </a:solidFill>
+                <a:latin typeface="Microsoft YaHei"/>
+                <a:ea typeface="Microsoft YaHei"/>
+                <a:cs typeface="Microsoft YaHei"/>
+              </a:rPr>
+              <a:t>限制</a:t>
+            </a:r>
+            <a:r>
+              <a:rPr sz="2325" b="0" dirty="0" err="1">
+                <a:solidFill>
+                  <a:srgbClr val="223342"/>
+                </a:solidFill>
+                <a:latin typeface="Microsoft YaHei"/>
+                <a:ea typeface="Microsoft YaHei"/>
+                <a:cs typeface="Microsoft YaHei"/>
+              </a:rPr>
+              <a:t>与累计偏移约束</a:t>
+            </a:r>
+            <a:endParaRPr sz="2325" b="0" dirty="0">
+              <a:solidFill>
+                <a:srgbClr val="223342"/>
+              </a:solidFill>
+              <a:latin typeface="Microsoft YaHei"/>
+              <a:ea typeface="Microsoft YaHei"/>
+              <a:cs typeface="Microsoft YaHei"/>
+            </a:endParaRPr>
           </a:p>
         </p:txBody>
       </p:sp>
@@ -2780,7 +2847,11 @@
               </a:defRPr>
             </a:pPr>
             <a:r>
-              <a:rPr sz="2625" b="1">
+              <a:rPr lang="zh-CN" altLang="en-US" dirty="0"/>
+              <a:t>位姿</a:t>
+            </a:r>
+            <a:r>
+              <a:rPr sz="2625" b="1" dirty="0" err="1">
                 <a:solidFill>
                   <a:srgbClr val="397570"/>
                 </a:solidFill>
@@ -2788,8 +2859,16 @@
                 <a:ea typeface="Microsoft YaHei"/>
                 <a:cs typeface="Microsoft YaHei"/>
               </a:rPr>
-              <a:t>接触估计与运动执行协调</a:t>
-            </a:r>
+              <a:t>估计与运动执行协调</a:t>
+            </a:r>
+            <a:endParaRPr sz="2625" b="1" dirty="0">
+              <a:solidFill>
+                <a:srgbClr val="397570"/>
+              </a:solidFill>
+              <a:latin typeface="Microsoft YaHei"/>
+              <a:ea typeface="Microsoft YaHei"/>
+              <a:cs typeface="Microsoft YaHei"/>
+            </a:endParaRPr>
           </a:p>
         </p:txBody>
       </p:sp>
@@ -2835,16 +2914,20 @@
               </a:defRPr>
             </a:pPr>
             <a:r>
-              <a:rPr sz="2325" b="0">
-                <a:solidFill>
-                  <a:srgbClr val="223342"/>
-                </a:solidFill>
-                <a:latin typeface="Microsoft YaHei"/>
-                <a:ea typeface="Microsoft YaHei"/>
-                <a:cs typeface="Microsoft YaHei"/>
-              </a:rPr>
-              <a:t>估计、参考与跟踪误差传递</a:t>
-            </a:r>
+              <a:rPr lang="zh-CN" altLang="en-US" dirty="0"/>
+              <a:t>分析估计与跟踪误差对组装精度的影响</a:t>
+            </a:r>
+            <a:br>
+              <a:rPr lang="zh-CN" altLang="en-US" dirty="0"/>
+            </a:br>
+            <a:endParaRPr sz="2325" b="0" dirty="0">
+              <a:solidFill>
+                <a:srgbClr val="223342"/>
+              </a:solidFill>
+              <a:latin typeface="Microsoft YaHei"/>
+              <a:ea typeface="Microsoft YaHei"/>
+              <a:cs typeface="Microsoft YaHei"/>
+            </a:endParaRPr>
           </a:p>
         </p:txBody>
       </p:sp>
@@ -2890,7 +2973,7 @@
               </a:defRPr>
             </a:pPr>
             <a:r>
-              <a:rPr sz="2325" b="0">
+              <a:rPr lang="zh-CN" altLang="en-US" sz="2325" b="0" dirty="0">
                 <a:solidFill>
                   <a:srgbClr val="223342"/>
                 </a:solidFill>
@@ -2898,7 +2981,7 @@
                 <a:ea typeface="Microsoft YaHei"/>
                 <a:cs typeface="Microsoft YaHei"/>
               </a:rPr>
-              <a:t>参考修正与驱动能力匹配</a:t>
+              <a:t>根据关节驱动能力调整参考修正</a:t>
             </a:r>
           </a:p>
         </p:txBody>
@@ -3281,124 +3364,6 @@
       </p:sp>
       <p:sp>
         <p:nvSpPr>
-          <p:cNvPr id="61" name="source-57-text">
-            <a:extLst>
-              <a:ext uri="{FF2B5EF4-FFF2-40B4-BE49-F238E27FC236}">
-                <a16:creationId xmlns:a16="http://schemas.microsoft.com/office/drawing/2014/main" id="{75641B7C-1BC8-48CC-9E2E-28080C6334AC}"/>
-              </a:ext>
-            </a:extLst>
-          </p:cNvPr>
-          <p:cNvSpPr/>
-          <p:nvPr/>
-        </p:nvSpPr>
-        <p:spPr>
-          <a:xfrm>
-            <a:off x="2864358" y="8442484"/>
-            <a:ext cx="3029521" cy="472440"/>
-          </a:xfrm>
-          <a:prstGeom prst="rect">
-            <a:avLst/>
-          </a:prstGeom>
-          <a:noFill/>
-          <a:ln w="0">
-            <a:noFill/>
-          </a:ln>
-        </p:spPr>
-        <p:txBody>
-          <a:bodyPr wrap="none" lIns="0" tIns="0" rIns="0" bIns="0" anchor="t">
-            <a:noAutofit/>
-          </a:bodyPr>
-          <a:lstStyle/>
-          <a:p>
-            <a:pPr algn="ctr" eaLnBrk="0" latinLnBrk="0" hangingPunct="0">
-              <a:defRPr sz="2325" b="1">
-                <a:solidFill>
-                  <a:srgbClr val="365C7E"/>
-                </a:solidFill>
-                <a:latin typeface="Microsoft YaHei"/>
-                <a:ea typeface="Microsoft YaHei"/>
-                <a:cs typeface="Microsoft YaHei"/>
-              </a:defRPr>
-            </a:pPr>
-            <a:r>
-              <a:rPr sz="2325" b="1" dirty="0" err="1">
-                <a:solidFill>
-                  <a:srgbClr val="365C7E"/>
-                </a:solidFill>
-                <a:latin typeface="Microsoft YaHei"/>
-                <a:ea typeface="Microsoft YaHei"/>
-                <a:cs typeface="Microsoft YaHei"/>
-              </a:rPr>
-              <a:t>受约束运动控制方法</a:t>
-            </a:r>
-            <a:endParaRPr sz="2325" b="1" dirty="0">
-              <a:solidFill>
-                <a:srgbClr val="365C7E"/>
-              </a:solidFill>
-              <a:latin typeface="Microsoft YaHei"/>
-              <a:ea typeface="Microsoft YaHei"/>
-              <a:cs typeface="Microsoft YaHei"/>
-            </a:endParaRPr>
-          </a:p>
-        </p:txBody>
-      </p:sp>
-      <p:sp>
-        <p:nvSpPr>
-          <p:cNvPr id="62" name="source-58-text">
-            <a:extLst>
-              <a:ext uri="{FF2B5EF4-FFF2-40B4-BE49-F238E27FC236}">
-                <a16:creationId xmlns:a16="http://schemas.microsoft.com/office/drawing/2014/main" id="{A8BD0108-3F61-4899-ADB2-24A01169959A}"/>
-              </a:ext>
-            </a:extLst>
-          </p:cNvPr>
-          <p:cNvSpPr/>
-          <p:nvPr/>
-        </p:nvSpPr>
-        <p:spPr>
-          <a:xfrm>
-            <a:off x="10914507" y="8442484"/>
-            <a:ext cx="3702748" cy="472440"/>
-          </a:xfrm>
-          <a:prstGeom prst="rect">
-            <a:avLst/>
-          </a:prstGeom>
-          <a:noFill/>
-          <a:ln w="0">
-            <a:noFill/>
-          </a:ln>
-        </p:spPr>
-        <p:txBody>
-          <a:bodyPr wrap="none" lIns="0" tIns="0" rIns="0" bIns="0" anchor="t">
-            <a:noAutofit/>
-          </a:bodyPr>
-          <a:lstStyle/>
-          <a:p>
-            <a:pPr algn="ctr" eaLnBrk="0" latinLnBrk="0" hangingPunct="0">
-              <a:defRPr sz="2325" b="1">
-                <a:solidFill>
-                  <a:srgbClr val="397570"/>
-                </a:solidFill>
-                <a:latin typeface="Microsoft YaHei"/>
-                <a:ea typeface="Microsoft YaHei"/>
-                <a:cs typeface="Microsoft YaHei"/>
-              </a:defRPr>
-            </a:pPr>
-            <a:r>
-              <a:rPr sz="2325" b="1">
-                <a:solidFill>
-                  <a:srgbClr val="397570"/>
-                </a:solidFill>
-                <a:latin typeface="Microsoft YaHei"/>
-                <a:ea typeface="Microsoft YaHei"/>
-                <a:cs typeface="Microsoft YaHei"/>
-              </a:rPr>
-              <a:t>接触引导与执行协调方法</a:t>
-            </a:r>
-          </a:p>
-        </p:txBody>
-      </p:sp>
-      <p:sp>
-        <p:nvSpPr>
           <p:cNvPr id="63" name="source-59-text">
             <a:extLst>
               <a:ext uri="{FF2B5EF4-FFF2-40B4-BE49-F238E27FC236}">
@@ -3441,7 +3406,7 @@
             <a:r>
               <a:rPr lang="zh-CN" altLang="en-US" sz="2250" b="1" dirty="0">
                 <a:solidFill>
-                  <a:srgbClr val="A77633"/>
+                  <a:srgbClr val="FF0000"/>
                 </a:solidFill>
                 <a:latin typeface="Microsoft YaHei"/>
                 <a:ea typeface="Microsoft YaHei"/>
@@ -3451,7 +3416,7 @@
             </a:r>
             <a:endParaRPr sz="2250" b="1" dirty="0">
               <a:solidFill>
-                <a:srgbClr val="A77633"/>
+                <a:srgbClr val="FF0000"/>
               </a:solidFill>
               <a:latin typeface="Microsoft YaHei"/>
               <a:ea typeface="Microsoft YaHei"/>
@@ -3497,7 +3462,7 @@
           <a:noFill/>
           <a:ln w="38100">
             <a:solidFill>
-              <a:srgbClr val="A77633"/>
+              <a:srgbClr val="FF0000"/>
             </a:solidFill>
             <a:prstDash val="solid"/>
             <a:tailEnd type="triangle"/>
@@ -3593,7 +3558,7 @@
           <a:noFill/>
           <a:ln w="38100">
             <a:solidFill>
-              <a:srgbClr val="A77633"/>
+              <a:srgbClr val="FF0000"/>
             </a:solidFill>
             <a:prstDash val="solid"/>
             <a:tailEnd type="triangle"/>
@@ -3614,7 +3579,7 @@
         </p:nvSpPr>
         <p:spPr>
           <a:xfrm>
-            <a:off x="4381500" y="8919211"/>
+            <a:off x="4381500" y="8517098"/>
             <a:ext cx="9525" cy="523875"/>
           </a:xfrm>
           <a:custGeom>
@@ -3659,7 +3624,7 @@
         </p:nvSpPr>
         <p:spPr>
           <a:xfrm>
-            <a:off x="4329113" y="9355774"/>
+            <a:off x="4329113" y="8953661"/>
             <a:ext cx="104775" cy="104775"/>
           </a:xfrm>
           <a:custGeom>
@@ -3708,7 +3673,7 @@
         </p:nvSpPr>
         <p:spPr>
           <a:xfrm>
-            <a:off x="12763500" y="8919211"/>
+            <a:off x="12763500" y="8517098"/>
             <a:ext cx="9525" cy="523875"/>
           </a:xfrm>
           <a:custGeom>
@@ -3753,7 +3718,7 @@
         </p:nvSpPr>
         <p:spPr>
           <a:xfrm>
-            <a:off x="12711113" y="9355774"/>
+            <a:off x="12711113" y="8953661"/>
             <a:ext cx="104775" cy="104775"/>
           </a:xfrm>
           <a:custGeom>
@@ -3802,8 +3767,8 @@
         </p:nvSpPr>
         <p:spPr>
           <a:xfrm>
-            <a:off x="1257300" y="9481186"/>
-            <a:ext cx="14630400" cy="3028950"/>
+            <a:off x="1257300" y="9079073"/>
+            <a:ext cx="14630400" cy="2122387"/>
           </a:xfrm>
           <a:prstGeom prst="roundRect">
             <a:avLst>
@@ -3835,7 +3800,7 @@
         </p:nvSpPr>
         <p:spPr>
           <a:xfrm>
-            <a:off x="1257300" y="9481186"/>
+            <a:off x="1257300" y="9079073"/>
             <a:ext cx="14630400" cy="685800"/>
           </a:xfrm>
           <a:prstGeom prst="roundRect">
@@ -3868,7 +3833,7 @@
         </p:nvSpPr>
         <p:spPr>
           <a:xfrm>
-            <a:off x="1257300" y="9928861"/>
+            <a:off x="1257300" y="9526748"/>
             <a:ext cx="14630400" cy="238125"/>
           </a:xfrm>
           <a:prstGeom prst="rect">
@@ -3897,7 +3862,7 @@
         </p:nvSpPr>
         <p:spPr>
           <a:xfrm>
-            <a:off x="5564028" y="9608821"/>
+            <a:off x="5564028" y="9206708"/>
             <a:ext cx="6026467" cy="563880"/>
           </a:xfrm>
           <a:prstGeom prst="rect">
@@ -3940,61 +3905,6 @@
       </p:sp>
       <p:sp>
         <p:nvSpPr>
-          <p:cNvPr id="79" name="source-71-text">
-            <a:extLst>
-              <a:ext uri="{FF2B5EF4-FFF2-40B4-BE49-F238E27FC236}">
-                <a16:creationId xmlns:a16="http://schemas.microsoft.com/office/drawing/2014/main" id="{CB5A8695-94C6-4EF4-8F34-5D0478B1A436}"/>
-              </a:ext>
-            </a:extLst>
-          </p:cNvPr>
-          <p:cNvSpPr/>
-          <p:nvPr/>
-        </p:nvSpPr>
-        <p:spPr>
-          <a:xfrm>
-            <a:off x="4270153" y="10322720"/>
-            <a:ext cx="8599932" cy="502920"/>
-          </a:xfrm>
-          <a:prstGeom prst="rect">
-            <a:avLst/>
-          </a:prstGeom>
-          <a:noFill/>
-          <a:ln w="0">
-            <a:noFill/>
-          </a:ln>
-        </p:spPr>
-        <p:txBody>
-          <a:bodyPr wrap="none" lIns="0" tIns="0" rIns="0" bIns="0" anchor="t">
-            <a:noAutofit/>
-          </a:bodyPr>
-          <a:lstStyle/>
-          <a:p>
-            <a:pPr algn="ctr" eaLnBrk="0" latinLnBrk="0" hangingPunct="0">
-              <a:defRPr sz="2475" b="0">
-                <a:solidFill>
-                  <a:srgbClr val="223342"/>
-                </a:solidFill>
-                <a:latin typeface="Microsoft YaHei"/>
-                <a:ea typeface="Microsoft YaHei"/>
-                <a:cs typeface="Microsoft YaHei"/>
-              </a:defRPr>
-            </a:pPr>
-            <a:r>
-              <a:rPr sz="2475" b="0">
-                <a:solidFill>
-                  <a:srgbClr val="223342"/>
-                </a:solidFill>
-                <a:latin typeface="Microsoft YaHei"/>
-                <a:ea typeface="Microsoft YaHei"/>
-                <a:cs typeface="Microsoft YaHei"/>
-              </a:rPr>
-              <a:t>基座运动复现　·　多源同步观测　·　独立精度评价</a:t>
-            </a:r>
-          </a:p>
-        </p:txBody>
-      </p:sp>
-      <p:sp>
-        <p:nvSpPr>
           <p:cNvPr id="80" name="source-72-rect">
             <a:extLst>
               <a:ext uri="{FF2B5EF4-FFF2-40B4-BE49-F238E27FC236}">
@@ -4007,7 +3917,7 @@
         </p:nvSpPr>
         <p:spPr>
           <a:xfrm>
-            <a:off x="1524000" y="10871836"/>
+            <a:off x="1524000" y="9894945"/>
             <a:ext cx="4191000" cy="1162050"/>
           </a:xfrm>
           <a:prstGeom prst="roundRect">
@@ -4040,7 +3950,7 @@
         </p:nvSpPr>
         <p:spPr>
           <a:xfrm>
-            <a:off x="2055876" y="10937558"/>
+            <a:off x="2055876" y="9960667"/>
             <a:ext cx="3127248" cy="487680"/>
           </a:xfrm>
           <a:prstGeom prst="rect">
@@ -4068,16 +3978,20 @@
               </a:defRPr>
             </a:pPr>
             <a:r>
-              <a:rPr sz="2400" b="1">
-                <a:solidFill>
-                  <a:srgbClr val="966F38"/>
-                </a:solidFill>
-                <a:latin typeface="Microsoft YaHei"/>
-                <a:ea typeface="Microsoft YaHei"/>
-                <a:cs typeface="Microsoft YaHei"/>
-              </a:rPr>
-              <a:t>模型与运动控制验证</a:t>
-            </a:r>
+              <a:rPr lang="zh-CN" altLang="en-US" b="1" dirty="0"/>
+              <a:t>动力学模型与运动控制验证</a:t>
+            </a:r>
+            <a:br>
+              <a:rPr lang="zh-CN" altLang="en-US" dirty="0"/>
+            </a:br>
+            <a:endParaRPr sz="2400" b="1" dirty="0">
+              <a:solidFill>
+                <a:srgbClr val="966F38"/>
+              </a:solidFill>
+              <a:latin typeface="Microsoft YaHei"/>
+              <a:ea typeface="Microsoft YaHei"/>
+              <a:cs typeface="Microsoft YaHei"/>
+            </a:endParaRPr>
           </a:p>
         </p:txBody>
       </p:sp>
@@ -4095,7 +4009,7 @@
         </p:nvSpPr>
         <p:spPr>
           <a:xfrm>
-            <a:off x="1827848" y="11329036"/>
+            <a:off x="1827848" y="10352145"/>
             <a:ext cx="3583305" cy="457200"/>
           </a:xfrm>
           <a:prstGeom prst="rect">
@@ -4123,7 +4037,7 @@
               </a:defRPr>
             </a:pPr>
             <a:r>
-              <a:rPr sz="2250" b="0">
+              <a:rPr lang="zh-CN" altLang="en-US" sz="2250" b="0" dirty="0">
                 <a:solidFill>
                   <a:srgbClr val="223342"/>
                 </a:solidFill>
@@ -4131,8 +4045,38 @@
                 <a:ea typeface="Microsoft YaHei"/>
                 <a:cs typeface="Microsoft YaHei"/>
               </a:rPr>
-              <a:t>位姿保持 · 轨迹跟踪</a:t>
-            </a:r>
+              <a:t>定点稳定</a:t>
+            </a:r>
+            <a:r>
+              <a:rPr sz="2250" b="0" dirty="0">
+                <a:solidFill>
+                  <a:srgbClr val="223342"/>
+                </a:solidFill>
+                <a:latin typeface="Microsoft YaHei"/>
+                <a:ea typeface="Microsoft YaHei"/>
+                <a:cs typeface="Microsoft YaHei"/>
+              </a:rPr>
+              <a:t> · </a:t>
+            </a:r>
+            <a:r>
+              <a:rPr sz="2250" b="0" dirty="0" err="1">
+                <a:solidFill>
+                  <a:srgbClr val="223342"/>
+                </a:solidFill>
+                <a:latin typeface="Microsoft YaHei"/>
+                <a:ea typeface="Microsoft YaHei"/>
+                <a:cs typeface="Microsoft YaHei"/>
+              </a:rPr>
+              <a:t>轨迹跟踪</a:t>
+            </a:r>
+            <a:endParaRPr sz="2250" b="0" dirty="0">
+              <a:solidFill>
+                <a:srgbClr val="223342"/>
+              </a:solidFill>
+              <a:latin typeface="Microsoft YaHei"/>
+              <a:ea typeface="Microsoft YaHei"/>
+              <a:cs typeface="Microsoft YaHei"/>
+            </a:endParaRPr>
           </a:p>
         </p:txBody>
       </p:sp>
@@ -4150,7 +4094,7 @@
         </p:nvSpPr>
         <p:spPr>
           <a:xfrm>
-            <a:off x="1990725" y="11662411"/>
+            <a:off x="1990725" y="10685520"/>
             <a:ext cx="3257550" cy="457200"/>
           </a:xfrm>
           <a:prstGeom prst="rect">
@@ -4178,7 +4122,7 @@
               </a:defRPr>
             </a:pPr>
             <a:r>
-              <a:rPr sz="2250" b="0">
+              <a:rPr lang="zh-CN" altLang="en-US" sz="2250" b="0" dirty="0">
                 <a:solidFill>
                   <a:srgbClr val="223342"/>
                 </a:solidFill>
@@ -4186,7 +4130,7 @@
                 <a:ea typeface="Microsoft YaHei"/>
                 <a:cs typeface="Microsoft YaHei"/>
               </a:rPr>
-              <a:t>误差响应 · 实时性</a:t>
+              <a:t>模型误差、跟踪精度与实时性</a:t>
             </a:r>
           </a:p>
         </p:txBody>
@@ -4205,7 +4149,7 @@
         </p:nvSpPr>
         <p:spPr>
           <a:xfrm>
-            <a:off x="6477000" y="10871836"/>
+            <a:off x="6477000" y="9894945"/>
             <a:ext cx="4191000" cy="1162050"/>
           </a:xfrm>
           <a:prstGeom prst="roundRect">
@@ -4238,7 +4182,7 @@
         </p:nvSpPr>
         <p:spPr>
           <a:xfrm>
-            <a:off x="7180231" y="10937558"/>
+            <a:off x="7180231" y="9960667"/>
             <a:ext cx="2779776" cy="487680"/>
           </a:xfrm>
           <a:prstGeom prst="rect">
@@ -4266,16 +4210,20 @@
               </a:defRPr>
             </a:pPr>
             <a:r>
-              <a:rPr sz="2400" b="1">
-                <a:solidFill>
-                  <a:srgbClr val="966F38"/>
-                </a:solidFill>
-                <a:latin typeface="Microsoft YaHei"/>
-                <a:ea typeface="Microsoft YaHei"/>
-                <a:cs typeface="Microsoft YaHei"/>
-              </a:rPr>
-              <a:t>接触组装分项对照</a:t>
-            </a:r>
+              <a:rPr lang="zh-CN" altLang="en-US" b="1" dirty="0"/>
+              <a:t>接触引导方法对照验证</a:t>
+            </a:r>
+            <a:br>
+              <a:rPr lang="zh-CN" altLang="en-US" dirty="0"/>
+            </a:br>
+            <a:endParaRPr sz="2400" b="1" dirty="0">
+              <a:solidFill>
+                <a:srgbClr val="966F38"/>
+              </a:solidFill>
+              <a:latin typeface="Microsoft YaHei"/>
+              <a:ea typeface="Microsoft YaHei"/>
+              <a:cs typeface="Microsoft YaHei"/>
+            </a:endParaRPr>
           </a:p>
         </p:txBody>
       </p:sp>
@@ -4293,7 +4241,7 @@
         </p:nvSpPr>
         <p:spPr>
           <a:xfrm>
-            <a:off x="6780848" y="11329036"/>
+            <a:off x="6780848" y="10352145"/>
             <a:ext cx="3583305" cy="457200"/>
           </a:xfrm>
           <a:prstGeom prst="rect">
@@ -4321,16 +4269,20 @@
               </a:defRPr>
             </a:pPr>
             <a:r>
-              <a:rPr sz="2250" b="0">
-                <a:solidFill>
-                  <a:srgbClr val="223342"/>
-                </a:solidFill>
-                <a:latin typeface="Microsoft YaHei"/>
-                <a:ea typeface="Microsoft YaHei"/>
-                <a:cs typeface="Microsoft YaHei"/>
-              </a:rPr>
-              <a:t>仅配准 · 仅参考修正</a:t>
-            </a:r>
+              <a:rPr lang="zh-CN" altLang="en-US" dirty="0"/>
+              <a:t>单独配准、单独修正与联合使用</a:t>
+            </a:r>
+            <a:br>
+              <a:rPr lang="zh-CN" altLang="en-US" dirty="0"/>
+            </a:br>
+            <a:endParaRPr sz="2250" b="0" dirty="0">
+              <a:solidFill>
+                <a:srgbClr val="223342"/>
+              </a:solidFill>
+              <a:latin typeface="Microsoft YaHei"/>
+              <a:ea typeface="Microsoft YaHei"/>
+              <a:cs typeface="Microsoft YaHei"/>
+            </a:endParaRPr>
           </a:p>
         </p:txBody>
       </p:sp>
@@ -4348,7 +4300,7 @@
         </p:nvSpPr>
         <p:spPr>
           <a:xfrm>
-            <a:off x="7106603" y="11662411"/>
+            <a:off x="7106603" y="10685520"/>
             <a:ext cx="2931795" cy="457200"/>
           </a:xfrm>
           <a:prstGeom prst="rect">
@@ -4376,16 +4328,17 @@
               </a:defRPr>
             </a:pPr>
             <a:r>
-              <a:rPr sz="2250" b="0">
-                <a:solidFill>
-                  <a:srgbClr val="223342"/>
-                </a:solidFill>
-                <a:latin typeface="Microsoft YaHei"/>
-                <a:ea typeface="Microsoft YaHei"/>
-                <a:cs typeface="Microsoft YaHei"/>
-              </a:rPr>
-              <a:t>联合方法及基准对照</a:t>
-            </a:r>
+              <a:rPr lang="zh-CN" altLang="en-US" dirty="0"/>
+              <a:t>对准精度与接触力对比</a:t>
+            </a:r>
+            <a:endParaRPr sz="2250" b="0" dirty="0">
+              <a:solidFill>
+                <a:srgbClr val="223342"/>
+              </a:solidFill>
+              <a:latin typeface="Microsoft YaHei"/>
+              <a:ea typeface="Microsoft YaHei"/>
+              <a:cs typeface="Microsoft YaHei"/>
+            </a:endParaRPr>
           </a:p>
         </p:txBody>
       </p:sp>
@@ -4403,7 +4356,7 @@
         </p:nvSpPr>
         <p:spPr>
           <a:xfrm>
-            <a:off x="11430000" y="10871836"/>
+            <a:off x="11430000" y="9894945"/>
             <a:ext cx="4191000" cy="1162050"/>
           </a:xfrm>
           <a:prstGeom prst="roundRect">
@@ -4436,7 +4389,7 @@
         </p:nvSpPr>
         <p:spPr>
           <a:xfrm>
-            <a:off x="12135612" y="10937558"/>
+            <a:off x="12135612" y="9960667"/>
             <a:ext cx="2779776" cy="487680"/>
           </a:xfrm>
           <a:prstGeom prst="rect">
@@ -4491,7 +4444,7 @@
         </p:nvSpPr>
         <p:spPr>
           <a:xfrm>
-            <a:off x="11736229" y="11329036"/>
+            <a:off x="11702415" y="10344104"/>
             <a:ext cx="3583305" cy="457200"/>
           </a:xfrm>
           <a:prstGeom prst="rect">
@@ -4519,7 +4472,7 @@
               </a:defRPr>
             </a:pPr>
             <a:r>
-              <a:rPr sz="2250" b="0">
+              <a:rPr sz="2250" b="0" dirty="0" err="1">
                 <a:solidFill>
                   <a:srgbClr val="223342"/>
                 </a:solidFill>
@@ -4527,41 +4480,103 @@
                 <a:ea typeface="Microsoft YaHei"/>
                 <a:cs typeface="Microsoft YaHei"/>
               </a:rPr>
-              <a:t>接近—对准—插接—保持</a:t>
-            </a:r>
+              <a:t>接近</a:t>
+            </a:r>
+            <a:r>
+              <a:rPr sz="2250" b="0" dirty="0">
+                <a:solidFill>
+                  <a:srgbClr val="223342"/>
+                </a:solidFill>
+                <a:latin typeface="Microsoft YaHei"/>
+                <a:ea typeface="Microsoft YaHei"/>
+                <a:cs typeface="Microsoft YaHei"/>
+              </a:rPr>
+              <a:t>—</a:t>
+            </a:r>
+            <a:r>
+              <a:rPr sz="2250" b="0" dirty="0" err="1">
+                <a:solidFill>
+                  <a:srgbClr val="223342"/>
+                </a:solidFill>
+                <a:latin typeface="Microsoft YaHei"/>
+                <a:ea typeface="Microsoft YaHei"/>
+                <a:cs typeface="Microsoft YaHei"/>
+              </a:rPr>
+              <a:t>对准</a:t>
+            </a:r>
+            <a:r>
+              <a:rPr sz="2250" b="0" dirty="0">
+                <a:solidFill>
+                  <a:srgbClr val="223342"/>
+                </a:solidFill>
+                <a:latin typeface="Microsoft YaHei"/>
+                <a:ea typeface="Microsoft YaHei"/>
+                <a:cs typeface="Microsoft YaHei"/>
+              </a:rPr>
+              <a:t>—</a:t>
+            </a:r>
+            <a:r>
+              <a:rPr sz="2250" b="0" dirty="0" err="1">
+                <a:solidFill>
+                  <a:srgbClr val="223342"/>
+                </a:solidFill>
+                <a:latin typeface="Microsoft YaHei"/>
+                <a:ea typeface="Microsoft YaHei"/>
+                <a:cs typeface="Microsoft YaHei"/>
+              </a:rPr>
+              <a:t>插接</a:t>
+            </a:r>
+            <a:r>
+              <a:rPr sz="2250" b="0" dirty="0">
+                <a:solidFill>
+                  <a:srgbClr val="223342"/>
+                </a:solidFill>
+                <a:latin typeface="Microsoft YaHei"/>
+                <a:ea typeface="Microsoft YaHei"/>
+                <a:cs typeface="Microsoft YaHei"/>
+              </a:rPr>
+              <a:t>—</a:t>
+            </a:r>
+            <a:r>
+              <a:rPr lang="zh-CN" altLang="en-US" dirty="0"/>
+              <a:t>到位</a:t>
+            </a:r>
+            <a:r>
+              <a:rPr sz="2250" b="0" dirty="0" err="1">
+                <a:solidFill>
+                  <a:srgbClr val="223342"/>
+                </a:solidFill>
+                <a:latin typeface="Microsoft YaHei"/>
+                <a:ea typeface="Microsoft YaHei"/>
+                <a:cs typeface="Microsoft YaHei"/>
+              </a:rPr>
+              <a:t>保持</a:t>
+            </a:r>
+            <a:endParaRPr lang="en-US" sz="2250" b="0" dirty="0">
+              <a:solidFill>
+                <a:srgbClr val="223342"/>
+              </a:solidFill>
+              <a:latin typeface="Microsoft YaHei"/>
+              <a:ea typeface="Microsoft YaHei"/>
+              <a:cs typeface="Microsoft YaHei"/>
+            </a:endParaRPr>
           </a:p>
-        </p:txBody>
-      </p:sp>
-      <p:sp>
-        <p:nvSpPr>
-          <p:cNvPr id="91" name="source-83-text">
-            <a:extLst>
-              <a:ext uri="{FF2B5EF4-FFF2-40B4-BE49-F238E27FC236}">
-                <a16:creationId xmlns:a16="http://schemas.microsoft.com/office/drawing/2014/main" id="{476A2F36-B001-410A-AAF7-DF2DAE95BA77}"/>
-              </a:ext>
-            </a:extLst>
-          </p:cNvPr>
-          <p:cNvSpPr/>
-          <p:nvPr/>
-        </p:nvSpPr>
-        <p:spPr>
-          <a:xfrm>
-            <a:off x="11570970" y="11662411"/>
-            <a:ext cx="3909060" cy="457200"/>
-          </a:xfrm>
-          <a:prstGeom prst="rect">
-            <a:avLst/>
-          </a:prstGeom>
-          <a:noFill/>
-          <a:ln w="0">
-            <a:noFill/>
-          </a:ln>
-        </p:spPr>
-        <p:txBody>
-          <a:bodyPr wrap="none" lIns="0" tIns="0" rIns="0" bIns="0" anchor="t">
-            <a:noAutofit/>
-          </a:bodyPr>
-          <a:lstStyle/>
+          <a:p>
+            <a:pPr algn="ctr" eaLnBrk="0" hangingPunct="0">
+              <a:defRPr sz="2250" b="0">
+                <a:solidFill>
+                  <a:srgbClr val="223342"/>
+                </a:solidFill>
+                <a:latin typeface="Microsoft YaHei"/>
+                <a:ea typeface="Microsoft YaHei"/>
+                <a:cs typeface="Microsoft YaHei"/>
+              </a:defRPr>
+            </a:pPr>
+            <a:r>
+              <a:rPr lang="zh-CN" altLang="en-US" dirty="0"/>
+              <a:t>评价组装精度与组装成功率</a:t>
+            </a:r>
+          </a:p>
           <a:p>
             <a:pPr algn="ctr" eaLnBrk="0" latinLnBrk="0" hangingPunct="0">
               <a:defRPr sz="2250" b="0">
@@ -4573,17 +4588,14 @@
                 <a:cs typeface="Microsoft YaHei"/>
               </a:defRPr>
             </a:pPr>
-            <a:r>
-              <a:rPr sz="2250" b="0">
-                <a:solidFill>
-                  <a:srgbClr val="223342"/>
-                </a:solidFill>
-                <a:latin typeface="Microsoft YaHei"/>
-                <a:ea typeface="Microsoft YaHei"/>
-                <a:cs typeface="Microsoft YaHei"/>
-              </a:rPr>
-              <a:t>到位精度 · 组装成功率</a:t>
-            </a:r>
+            <a:endParaRPr sz="2250" b="0" dirty="0">
+              <a:solidFill>
+                <a:srgbClr val="223342"/>
+              </a:solidFill>
+              <a:latin typeface="Microsoft YaHei"/>
+              <a:ea typeface="Microsoft YaHei"/>
+              <a:cs typeface="Microsoft YaHei"/>
+            </a:endParaRPr>
           </a:p>
         </p:txBody>
       </p:sp>
@@ -4601,7 +4613,7 @@
         </p:nvSpPr>
         <p:spPr>
           <a:xfrm>
-            <a:off x="5781675" y="11452861"/>
+            <a:off x="5781675" y="10475970"/>
             <a:ext cx="619125" cy="9525"/>
           </a:xfrm>
           <a:custGeom>
@@ -4646,7 +4658,7 @@
         </p:nvSpPr>
         <p:spPr>
           <a:xfrm>
-            <a:off x="6313488" y="11400474"/>
+            <a:off x="6313488" y="10423583"/>
             <a:ext cx="104775" cy="104775"/>
           </a:xfrm>
           <a:custGeom>
@@ -4695,7 +4707,7 @@
         </p:nvSpPr>
         <p:spPr>
           <a:xfrm>
-            <a:off x="10734675" y="11452861"/>
+            <a:off x="10734675" y="10475970"/>
             <a:ext cx="619125" cy="9525"/>
           </a:xfrm>
           <a:custGeom>
@@ -4740,7 +4752,7 @@
         </p:nvSpPr>
         <p:spPr>
           <a:xfrm>
-            <a:off x="11266488" y="11400474"/>
+            <a:off x="11266488" y="10423583"/>
             <a:ext cx="104775" cy="104775"/>
           </a:xfrm>
           <a:custGeom>
@@ -4777,112 +4789,6 @@
       </p:sp>
       <p:sp>
         <p:nvSpPr>
-          <p:cNvPr id="96" name="source-86-text">
-            <a:extLst>
-              <a:ext uri="{FF2B5EF4-FFF2-40B4-BE49-F238E27FC236}">
-                <a16:creationId xmlns:a16="http://schemas.microsoft.com/office/drawing/2014/main" id="{4FB8BF67-7F18-47EE-B4CF-30F91770010A}"/>
-              </a:ext>
-            </a:extLst>
-          </p:cNvPr>
-          <p:cNvSpPr/>
-          <p:nvPr/>
-        </p:nvSpPr>
-        <p:spPr>
-          <a:xfrm>
-            <a:off x="4500563" y="12062461"/>
-            <a:ext cx="8143875" cy="457200"/>
-          </a:xfrm>
-          <a:prstGeom prst="rect">
-            <a:avLst/>
-          </a:prstGeom>
-          <a:noFill/>
-          <a:ln w="0">
-            <a:noFill/>
-          </a:ln>
-        </p:spPr>
-        <p:txBody>
-          <a:bodyPr wrap="none" lIns="0" tIns="0" rIns="0" bIns="0" anchor="t">
-            <a:noAutofit/>
-          </a:bodyPr>
-          <a:lstStyle/>
-          <a:p>
-            <a:pPr algn="ctr" eaLnBrk="0" latinLnBrk="0" hangingPunct="0">
-              <a:defRPr sz="2250" b="0">
-                <a:solidFill>
-                  <a:srgbClr val="546371"/>
-                </a:solidFill>
-                <a:latin typeface="Microsoft YaHei"/>
-                <a:ea typeface="Microsoft YaHei"/>
-                <a:cs typeface="Microsoft YaHei"/>
-              </a:defRPr>
-            </a:pPr>
-            <a:r>
-              <a:rPr sz="2250" b="0">
-                <a:solidFill>
-                  <a:srgbClr val="546371"/>
-                </a:solidFill>
-                <a:latin typeface="Microsoft YaHei"/>
-                <a:ea typeface="Microsoft YaHei"/>
-                <a:cs typeface="Microsoft YaHei"/>
-              </a:rPr>
-              <a:t>静止基座与不同激励对照，检验方法的有效性与适用范围</a:t>
-            </a:r>
-          </a:p>
-        </p:txBody>
-      </p:sp>
-      <p:sp>
-        <p:nvSpPr>
-          <p:cNvPr id="98" name="source-87-path-arrowhead">
-            <a:extLst>
-              <a:ext uri="{FF2B5EF4-FFF2-40B4-BE49-F238E27FC236}">
-                <a16:creationId xmlns:a16="http://schemas.microsoft.com/office/drawing/2014/main" id="{15526F0B-71D5-4544-9DA5-B35A36EFB815}"/>
-              </a:ext>
-            </a:extLst>
-          </p:cNvPr>
-          <p:cNvSpPr>
-            <a:spLocks noGrp="1"/>
-          </p:cNvSpPr>
-          <p:nvPr/>
-        </p:nvSpPr>
-        <p:spPr>
-          <a:xfrm>
-            <a:off x="1112838" y="3675699"/>
-            <a:ext cx="104775" cy="104775"/>
-          </a:xfrm>
-          <a:custGeom>
-            <a:avLst/>
-            <a:gdLst/>
-            <a:ahLst/>
-            <a:cxnLst/>
-            <a:rect l="0" t="0" r="0" b="0"/>
-            <a:pathLst>
-              <a:path w="104775" h="104775">
-                <a:moveTo>
-                  <a:pt x="0" y="0"/>
-                </a:moveTo>
-                <a:lnTo>
-                  <a:pt x="104775" y="52388"/>
-                </a:lnTo>
-                <a:lnTo>
-                  <a:pt x="0" y="104775"/>
-                </a:lnTo>
-                <a:lnTo>
-                  <a:pt x="26194" y="52388"/>
-                </a:lnTo>
-                <a:close/>
-              </a:path>
-            </a:pathLst>
-          </a:custGeom>
-          <a:solidFill>
-            <a:srgbClr val="566C7B"/>
-          </a:solidFill>
-          <a:ln w="0">
-            <a:noFill/>
-          </a:ln>
-        </p:spPr>
-      </p:sp>
-      <p:sp>
-        <p:nvSpPr>
           <p:cNvPr id="104" name="source-59-text">
             <a:extLst>
               <a:ext uri="{FF2B5EF4-FFF2-40B4-BE49-F238E27FC236}">
@@ -4925,7 +4831,7 @@
             <a:r>
               <a:rPr lang="zh-CN" altLang="en-US" sz="2250" b="1" dirty="0">
                 <a:solidFill>
-                  <a:srgbClr val="A77633"/>
+                  <a:srgbClr val="FF0000"/>
                 </a:solidFill>
                 <a:latin typeface="Microsoft YaHei"/>
                 <a:ea typeface="Microsoft YaHei"/>
@@ -4935,7 +4841,7 @@
             </a:r>
             <a:endParaRPr sz="2250" b="1" dirty="0">
               <a:solidFill>
-                <a:srgbClr val="A77633"/>
+                <a:srgbClr val="FF0000"/>
               </a:solidFill>
               <a:latin typeface="Microsoft YaHei"/>
               <a:ea typeface="Microsoft YaHei"/>
